--- a/docs/The-Media-Customs-deck.pptx
+++ b/docs/The-Media-Customs-deck.pptx
@@ -3875,7 +3875,7 @@
                 </a:solidFill>
                 <a:latin typeface="Menlo"/>
               </a:rPr>
-              <a:t>github.com/tdries/td-devpost-agentic-cinema</a:t>
+              <a:t>github.com/tdries/devpost-hackathon-agentic-cinema</a:t>
             </a:r>
           </a:p>
           <a:p>
